--- a/宣道詩/(宣道詩91)我知所信是誰.pptx
+++ b/宣道詩/(宣道詩91)我知所信是誰.pptx
@@ -181,7 +181,7 @@
           <a:lstStyle/>
           <a:p>
             <a:r>
-              <a:rPr lang="en-US" altLang="zh-TW" smtClean="0"/>
+              <a:rPr lang="en-US" altLang="zh-TW"/>
               <a:t>Click to edit Master title style</a:t>
             </a:r>
             <a:endParaRPr lang="zh-TW" altLang="en-US"/>
@@ -300,7 +300,7 @@
           </a:lstStyle>
           <a:p>
             <a:r>
-              <a:rPr lang="en-US" altLang="zh-TW" smtClean="0"/>
+              <a:rPr lang="en-US" altLang="zh-TW"/>
               <a:t>Click to edit Master subtitle style</a:t>
             </a:r>
             <a:endParaRPr lang="zh-TW" altLang="en-US"/>
@@ -324,7 +324,7 @@
           <a:p>
             <a:fld id="{3D18440D-73A6-4284-860D-9AB8F0F2F29B}" type="datetimeFigureOut">
               <a:rPr lang="zh-TW" altLang="en-US" smtClean="0"/>
-              <a:t>2021/5/14</a:t>
+              <a:t>2025/10/11</a:t>
             </a:fld>
             <a:endParaRPr lang="zh-TW" altLang="en-US"/>
           </a:p>
@@ -418,7 +418,7 @@
           <a:lstStyle/>
           <a:p>
             <a:r>
-              <a:rPr lang="en-US" altLang="zh-TW" smtClean="0"/>
+              <a:rPr lang="en-US" altLang="zh-TW"/>
               <a:t>Click to edit Master title style</a:t>
             </a:r>
             <a:endParaRPr lang="zh-TW" altLang="en-US"/>
@@ -442,35 +442,35 @@
           <a:p>
             <a:pPr lvl="0"/>
             <a:r>
-              <a:rPr lang="en-US" altLang="zh-TW" smtClean="0"/>
+              <a:rPr lang="en-US" altLang="zh-TW"/>
               <a:t>Edit Master text styles</a:t>
             </a:r>
           </a:p>
           <a:p>
             <a:pPr lvl="1"/>
             <a:r>
-              <a:rPr lang="en-US" altLang="zh-TW" smtClean="0"/>
+              <a:rPr lang="en-US" altLang="zh-TW"/>
               <a:t>Second level</a:t>
             </a:r>
           </a:p>
           <a:p>
             <a:pPr lvl="2"/>
             <a:r>
-              <a:rPr lang="en-US" altLang="zh-TW" smtClean="0"/>
+              <a:rPr lang="en-US" altLang="zh-TW"/>
               <a:t>Third level</a:t>
             </a:r>
           </a:p>
           <a:p>
             <a:pPr lvl="3"/>
             <a:r>
-              <a:rPr lang="en-US" altLang="zh-TW" smtClean="0"/>
+              <a:rPr lang="en-US" altLang="zh-TW"/>
               <a:t>Fourth level</a:t>
             </a:r>
           </a:p>
           <a:p>
             <a:pPr lvl="4"/>
             <a:r>
-              <a:rPr lang="en-US" altLang="zh-TW" smtClean="0"/>
+              <a:rPr lang="en-US" altLang="zh-TW"/>
               <a:t>Fifth level</a:t>
             </a:r>
             <a:endParaRPr lang="zh-TW" altLang="en-US"/>
@@ -494,7 +494,7 @@
           <a:p>
             <a:fld id="{3D18440D-73A6-4284-860D-9AB8F0F2F29B}" type="datetimeFigureOut">
               <a:rPr lang="zh-TW" altLang="en-US" smtClean="0"/>
-              <a:t>2021/5/14</a:t>
+              <a:t>2025/10/11</a:t>
             </a:fld>
             <a:endParaRPr lang="zh-TW" altLang="en-US"/>
           </a:p>
@@ -593,7 +593,7 @@
           <a:lstStyle/>
           <a:p>
             <a:r>
-              <a:rPr lang="en-US" altLang="zh-TW" smtClean="0"/>
+              <a:rPr lang="en-US" altLang="zh-TW"/>
               <a:t>Click to edit Master title style</a:t>
             </a:r>
             <a:endParaRPr lang="zh-TW" altLang="en-US"/>
@@ -622,35 +622,35 @@
           <a:p>
             <a:pPr lvl="0"/>
             <a:r>
-              <a:rPr lang="en-US" altLang="zh-TW" smtClean="0"/>
+              <a:rPr lang="en-US" altLang="zh-TW"/>
               <a:t>Edit Master text styles</a:t>
             </a:r>
           </a:p>
           <a:p>
             <a:pPr lvl="1"/>
             <a:r>
-              <a:rPr lang="en-US" altLang="zh-TW" smtClean="0"/>
+              <a:rPr lang="en-US" altLang="zh-TW"/>
               <a:t>Second level</a:t>
             </a:r>
           </a:p>
           <a:p>
             <a:pPr lvl="2"/>
             <a:r>
-              <a:rPr lang="en-US" altLang="zh-TW" smtClean="0"/>
+              <a:rPr lang="en-US" altLang="zh-TW"/>
               <a:t>Third level</a:t>
             </a:r>
           </a:p>
           <a:p>
             <a:pPr lvl="3"/>
             <a:r>
-              <a:rPr lang="en-US" altLang="zh-TW" smtClean="0"/>
+              <a:rPr lang="en-US" altLang="zh-TW"/>
               <a:t>Fourth level</a:t>
             </a:r>
           </a:p>
           <a:p>
             <a:pPr lvl="4"/>
             <a:r>
-              <a:rPr lang="en-US" altLang="zh-TW" smtClean="0"/>
+              <a:rPr lang="en-US" altLang="zh-TW"/>
               <a:t>Fifth level</a:t>
             </a:r>
             <a:endParaRPr lang="zh-TW" altLang="en-US"/>
@@ -674,7 +674,7 @@
           <a:p>
             <a:fld id="{3D18440D-73A6-4284-860D-9AB8F0F2F29B}" type="datetimeFigureOut">
               <a:rPr lang="zh-TW" altLang="en-US" smtClean="0"/>
-              <a:t>2021/5/14</a:t>
+              <a:t>2025/10/11</a:t>
             </a:fld>
             <a:endParaRPr lang="zh-TW" altLang="en-US"/>
           </a:p>
@@ -768,7 +768,7 @@
           <a:lstStyle/>
           <a:p>
             <a:r>
-              <a:rPr lang="en-US" altLang="zh-TW" smtClean="0"/>
+              <a:rPr lang="en-US" altLang="zh-TW"/>
               <a:t>Click to edit Master title style</a:t>
             </a:r>
             <a:endParaRPr lang="zh-TW" altLang="en-US"/>
@@ -792,35 +792,35 @@
           <a:p>
             <a:pPr lvl="0"/>
             <a:r>
-              <a:rPr lang="en-US" altLang="zh-TW" smtClean="0"/>
+              <a:rPr lang="en-US" altLang="zh-TW"/>
               <a:t>Edit Master text styles</a:t>
             </a:r>
           </a:p>
           <a:p>
             <a:pPr lvl="1"/>
             <a:r>
-              <a:rPr lang="en-US" altLang="zh-TW" smtClean="0"/>
+              <a:rPr lang="en-US" altLang="zh-TW"/>
               <a:t>Second level</a:t>
             </a:r>
           </a:p>
           <a:p>
             <a:pPr lvl="2"/>
             <a:r>
-              <a:rPr lang="en-US" altLang="zh-TW" smtClean="0"/>
+              <a:rPr lang="en-US" altLang="zh-TW"/>
               <a:t>Third level</a:t>
             </a:r>
           </a:p>
           <a:p>
             <a:pPr lvl="3"/>
             <a:r>
-              <a:rPr lang="en-US" altLang="zh-TW" smtClean="0"/>
+              <a:rPr lang="en-US" altLang="zh-TW"/>
               <a:t>Fourth level</a:t>
             </a:r>
           </a:p>
           <a:p>
             <a:pPr lvl="4"/>
             <a:r>
-              <a:rPr lang="en-US" altLang="zh-TW" smtClean="0"/>
+              <a:rPr lang="en-US" altLang="zh-TW"/>
               <a:t>Fifth level</a:t>
             </a:r>
             <a:endParaRPr lang="zh-TW" altLang="en-US"/>
@@ -844,7 +844,7 @@
           <a:p>
             <a:fld id="{3D18440D-73A6-4284-860D-9AB8F0F2F29B}" type="datetimeFigureOut">
               <a:rPr lang="zh-TW" altLang="en-US" smtClean="0"/>
-              <a:t>2021/5/14</a:t>
+              <a:t>2025/10/11</a:t>
             </a:fld>
             <a:endParaRPr lang="zh-TW" altLang="en-US"/>
           </a:p>
@@ -947,7 +947,7 @@
           </a:lstStyle>
           <a:p>
             <a:r>
-              <a:rPr lang="en-US" altLang="zh-TW" smtClean="0"/>
+              <a:rPr lang="en-US" altLang="zh-TW"/>
               <a:t>Click to edit Master title style</a:t>
             </a:r>
             <a:endParaRPr lang="zh-TW" altLang="en-US"/>
@@ -1067,7 +1067,7 @@
           <a:p>
             <a:pPr lvl="0"/>
             <a:r>
-              <a:rPr lang="en-US" altLang="zh-TW" smtClean="0"/>
+              <a:rPr lang="en-US" altLang="zh-TW"/>
               <a:t>Edit Master text styles</a:t>
             </a:r>
           </a:p>
@@ -1090,7 +1090,7 @@
           <a:p>
             <a:fld id="{3D18440D-73A6-4284-860D-9AB8F0F2F29B}" type="datetimeFigureOut">
               <a:rPr lang="zh-TW" altLang="en-US" smtClean="0"/>
-              <a:t>2021/5/14</a:t>
+              <a:t>2025/10/11</a:t>
             </a:fld>
             <a:endParaRPr lang="zh-TW" altLang="en-US"/>
           </a:p>
@@ -1184,7 +1184,7 @@
           <a:lstStyle/>
           <a:p>
             <a:r>
-              <a:rPr lang="en-US" altLang="zh-TW" smtClean="0"/>
+              <a:rPr lang="en-US" altLang="zh-TW"/>
               <a:t>Click to edit Master title style</a:t>
             </a:r>
             <a:endParaRPr lang="zh-TW" altLang="en-US"/>
@@ -1241,35 +1241,35 @@
           <a:p>
             <a:pPr lvl="0"/>
             <a:r>
-              <a:rPr lang="en-US" altLang="zh-TW" smtClean="0"/>
+              <a:rPr lang="en-US" altLang="zh-TW"/>
               <a:t>Edit Master text styles</a:t>
             </a:r>
           </a:p>
           <a:p>
             <a:pPr lvl="1"/>
             <a:r>
-              <a:rPr lang="en-US" altLang="zh-TW" smtClean="0"/>
+              <a:rPr lang="en-US" altLang="zh-TW"/>
               <a:t>Second level</a:t>
             </a:r>
           </a:p>
           <a:p>
             <a:pPr lvl="2"/>
             <a:r>
-              <a:rPr lang="en-US" altLang="zh-TW" smtClean="0"/>
+              <a:rPr lang="en-US" altLang="zh-TW"/>
               <a:t>Third level</a:t>
             </a:r>
           </a:p>
           <a:p>
             <a:pPr lvl="3"/>
             <a:r>
-              <a:rPr lang="en-US" altLang="zh-TW" smtClean="0"/>
+              <a:rPr lang="en-US" altLang="zh-TW"/>
               <a:t>Fourth level</a:t>
             </a:r>
           </a:p>
           <a:p>
             <a:pPr lvl="4"/>
             <a:r>
-              <a:rPr lang="en-US" altLang="zh-TW" smtClean="0"/>
+              <a:rPr lang="en-US" altLang="zh-TW"/>
               <a:t>Fifth level</a:t>
             </a:r>
             <a:endParaRPr lang="zh-TW" altLang="en-US"/>
@@ -1326,35 +1326,35 @@
           <a:p>
             <a:pPr lvl="0"/>
             <a:r>
-              <a:rPr lang="en-US" altLang="zh-TW" smtClean="0"/>
+              <a:rPr lang="en-US" altLang="zh-TW"/>
               <a:t>Edit Master text styles</a:t>
             </a:r>
           </a:p>
           <a:p>
             <a:pPr lvl="1"/>
             <a:r>
-              <a:rPr lang="en-US" altLang="zh-TW" smtClean="0"/>
+              <a:rPr lang="en-US" altLang="zh-TW"/>
               <a:t>Second level</a:t>
             </a:r>
           </a:p>
           <a:p>
             <a:pPr lvl="2"/>
             <a:r>
-              <a:rPr lang="en-US" altLang="zh-TW" smtClean="0"/>
+              <a:rPr lang="en-US" altLang="zh-TW"/>
               <a:t>Third level</a:t>
             </a:r>
           </a:p>
           <a:p>
             <a:pPr lvl="3"/>
             <a:r>
-              <a:rPr lang="en-US" altLang="zh-TW" smtClean="0"/>
+              <a:rPr lang="en-US" altLang="zh-TW"/>
               <a:t>Fourth level</a:t>
             </a:r>
           </a:p>
           <a:p>
             <a:pPr lvl="4"/>
             <a:r>
-              <a:rPr lang="en-US" altLang="zh-TW" smtClean="0"/>
+              <a:rPr lang="en-US" altLang="zh-TW"/>
               <a:t>Fifth level</a:t>
             </a:r>
             <a:endParaRPr lang="zh-TW" altLang="en-US"/>
@@ -1378,7 +1378,7 @@
           <a:p>
             <a:fld id="{3D18440D-73A6-4284-860D-9AB8F0F2F29B}" type="datetimeFigureOut">
               <a:rPr lang="zh-TW" altLang="en-US" smtClean="0"/>
-              <a:t>2021/5/14</a:t>
+              <a:t>2025/10/11</a:t>
             </a:fld>
             <a:endParaRPr lang="zh-TW" altLang="en-US"/>
           </a:p>
@@ -1476,7 +1476,7 @@
           </a:lstStyle>
           <a:p>
             <a:r>
-              <a:rPr lang="en-US" altLang="zh-TW" smtClean="0"/>
+              <a:rPr lang="en-US" altLang="zh-TW"/>
               <a:t>Click to edit Master title style</a:t>
             </a:r>
             <a:endParaRPr lang="zh-TW" altLang="en-US"/>
@@ -1542,7 +1542,7 @@
           <a:p>
             <a:pPr lvl="0"/>
             <a:r>
-              <a:rPr lang="en-US" altLang="zh-TW" smtClean="0"/>
+              <a:rPr lang="en-US" altLang="zh-TW"/>
               <a:t>Edit Master text styles</a:t>
             </a:r>
           </a:p>
@@ -1598,35 +1598,35 @@
           <a:p>
             <a:pPr lvl="0"/>
             <a:r>
-              <a:rPr lang="en-US" altLang="zh-TW" smtClean="0"/>
+              <a:rPr lang="en-US" altLang="zh-TW"/>
               <a:t>Edit Master text styles</a:t>
             </a:r>
           </a:p>
           <a:p>
             <a:pPr lvl="1"/>
             <a:r>
-              <a:rPr lang="en-US" altLang="zh-TW" smtClean="0"/>
+              <a:rPr lang="en-US" altLang="zh-TW"/>
               <a:t>Second level</a:t>
             </a:r>
           </a:p>
           <a:p>
             <a:pPr lvl="2"/>
             <a:r>
-              <a:rPr lang="en-US" altLang="zh-TW" smtClean="0"/>
+              <a:rPr lang="en-US" altLang="zh-TW"/>
               <a:t>Third level</a:t>
             </a:r>
           </a:p>
           <a:p>
             <a:pPr lvl="3"/>
             <a:r>
-              <a:rPr lang="en-US" altLang="zh-TW" smtClean="0"/>
+              <a:rPr lang="en-US" altLang="zh-TW"/>
               <a:t>Fourth level</a:t>
             </a:r>
           </a:p>
           <a:p>
             <a:pPr lvl="4"/>
             <a:r>
-              <a:rPr lang="en-US" altLang="zh-TW" smtClean="0"/>
+              <a:rPr lang="en-US" altLang="zh-TW"/>
               <a:t>Fifth level</a:t>
             </a:r>
             <a:endParaRPr lang="zh-TW" altLang="en-US"/>
@@ -1692,7 +1692,7 @@
           <a:p>
             <a:pPr lvl="0"/>
             <a:r>
-              <a:rPr lang="en-US" altLang="zh-TW" smtClean="0"/>
+              <a:rPr lang="en-US" altLang="zh-TW"/>
               <a:t>Edit Master text styles</a:t>
             </a:r>
           </a:p>
@@ -1748,35 +1748,35 @@
           <a:p>
             <a:pPr lvl="0"/>
             <a:r>
-              <a:rPr lang="en-US" altLang="zh-TW" smtClean="0"/>
+              <a:rPr lang="en-US" altLang="zh-TW"/>
               <a:t>Edit Master text styles</a:t>
             </a:r>
           </a:p>
           <a:p>
             <a:pPr lvl="1"/>
             <a:r>
-              <a:rPr lang="en-US" altLang="zh-TW" smtClean="0"/>
+              <a:rPr lang="en-US" altLang="zh-TW"/>
               <a:t>Second level</a:t>
             </a:r>
           </a:p>
           <a:p>
             <a:pPr lvl="2"/>
             <a:r>
-              <a:rPr lang="en-US" altLang="zh-TW" smtClean="0"/>
+              <a:rPr lang="en-US" altLang="zh-TW"/>
               <a:t>Third level</a:t>
             </a:r>
           </a:p>
           <a:p>
             <a:pPr lvl="3"/>
             <a:r>
-              <a:rPr lang="en-US" altLang="zh-TW" smtClean="0"/>
+              <a:rPr lang="en-US" altLang="zh-TW"/>
               <a:t>Fourth level</a:t>
             </a:r>
           </a:p>
           <a:p>
             <a:pPr lvl="4"/>
             <a:r>
-              <a:rPr lang="en-US" altLang="zh-TW" smtClean="0"/>
+              <a:rPr lang="en-US" altLang="zh-TW"/>
               <a:t>Fifth level</a:t>
             </a:r>
             <a:endParaRPr lang="zh-TW" altLang="en-US"/>
@@ -1800,7 +1800,7 @@
           <a:p>
             <a:fld id="{3D18440D-73A6-4284-860D-9AB8F0F2F29B}" type="datetimeFigureOut">
               <a:rPr lang="zh-TW" altLang="en-US" smtClean="0"/>
-              <a:t>2021/5/14</a:t>
+              <a:t>2025/10/11</a:t>
             </a:fld>
             <a:endParaRPr lang="zh-TW" altLang="en-US"/>
           </a:p>
@@ -1894,7 +1894,7 @@
           <a:lstStyle/>
           <a:p>
             <a:r>
-              <a:rPr lang="en-US" altLang="zh-TW" smtClean="0"/>
+              <a:rPr lang="en-US" altLang="zh-TW"/>
               <a:t>Click to edit Master title style</a:t>
             </a:r>
             <a:endParaRPr lang="zh-TW" altLang="en-US"/>
@@ -1918,7 +1918,7 @@
           <a:p>
             <a:fld id="{3D18440D-73A6-4284-860D-9AB8F0F2F29B}" type="datetimeFigureOut">
               <a:rPr lang="zh-TW" altLang="en-US" smtClean="0"/>
-              <a:t>2021/5/14</a:t>
+              <a:t>2025/10/11</a:t>
             </a:fld>
             <a:endParaRPr lang="zh-TW" altLang="en-US"/>
           </a:p>
@@ -2013,7 +2013,7 @@
           <a:p>
             <a:fld id="{3D18440D-73A6-4284-860D-9AB8F0F2F29B}" type="datetimeFigureOut">
               <a:rPr lang="zh-TW" altLang="en-US" smtClean="0"/>
-              <a:t>2021/5/14</a:t>
+              <a:t>2025/10/11</a:t>
             </a:fld>
             <a:endParaRPr lang="zh-TW" altLang="en-US"/>
           </a:p>
@@ -2116,7 +2116,7 @@
           </a:lstStyle>
           <a:p>
             <a:r>
-              <a:rPr lang="en-US" altLang="zh-TW" smtClean="0"/>
+              <a:rPr lang="en-US" altLang="zh-TW"/>
               <a:t>Click to edit Master title style</a:t>
             </a:r>
             <a:endParaRPr lang="zh-TW" altLang="en-US"/>
@@ -2173,35 +2173,35 @@
           <a:p>
             <a:pPr lvl="0"/>
             <a:r>
-              <a:rPr lang="en-US" altLang="zh-TW" smtClean="0"/>
+              <a:rPr lang="en-US" altLang="zh-TW"/>
               <a:t>Edit Master text styles</a:t>
             </a:r>
           </a:p>
           <a:p>
             <a:pPr lvl="1"/>
             <a:r>
-              <a:rPr lang="en-US" altLang="zh-TW" smtClean="0"/>
+              <a:rPr lang="en-US" altLang="zh-TW"/>
               <a:t>Second level</a:t>
             </a:r>
           </a:p>
           <a:p>
             <a:pPr lvl="2"/>
             <a:r>
-              <a:rPr lang="en-US" altLang="zh-TW" smtClean="0"/>
+              <a:rPr lang="en-US" altLang="zh-TW"/>
               <a:t>Third level</a:t>
             </a:r>
           </a:p>
           <a:p>
             <a:pPr lvl="3"/>
             <a:r>
-              <a:rPr lang="en-US" altLang="zh-TW" smtClean="0"/>
+              <a:rPr lang="en-US" altLang="zh-TW"/>
               <a:t>Fourth level</a:t>
             </a:r>
           </a:p>
           <a:p>
             <a:pPr lvl="4"/>
             <a:r>
-              <a:rPr lang="en-US" altLang="zh-TW" smtClean="0"/>
+              <a:rPr lang="en-US" altLang="zh-TW"/>
               <a:t>Fifth level</a:t>
             </a:r>
             <a:endParaRPr lang="zh-TW" altLang="en-US"/>
@@ -2267,7 +2267,7 @@
           <a:p>
             <a:pPr lvl="0"/>
             <a:r>
-              <a:rPr lang="en-US" altLang="zh-TW" smtClean="0"/>
+              <a:rPr lang="en-US" altLang="zh-TW"/>
               <a:t>Edit Master text styles</a:t>
             </a:r>
           </a:p>
@@ -2290,7 +2290,7 @@
           <a:p>
             <a:fld id="{3D18440D-73A6-4284-860D-9AB8F0F2F29B}" type="datetimeFigureOut">
               <a:rPr lang="zh-TW" altLang="en-US" smtClean="0"/>
-              <a:t>2021/5/14</a:t>
+              <a:t>2025/10/11</a:t>
             </a:fld>
             <a:endParaRPr lang="zh-TW" altLang="en-US"/>
           </a:p>
@@ -2393,7 +2393,7 @@
           </a:lstStyle>
           <a:p>
             <a:r>
-              <a:rPr lang="en-US" altLang="zh-TW" smtClean="0"/>
+              <a:rPr lang="en-US" altLang="zh-TW"/>
               <a:t>Click to edit Master title style</a:t>
             </a:r>
             <a:endParaRPr lang="zh-TW" altLang="en-US"/>
@@ -2458,7 +2458,7 @@
           </a:lstStyle>
           <a:p>
             <a:r>
-              <a:rPr lang="en-US" altLang="zh-TW" smtClean="0"/>
+              <a:rPr lang="en-US" altLang="zh-TW"/>
               <a:t>Click icon to add picture</a:t>
             </a:r>
             <a:endParaRPr lang="zh-TW" altLang="en-US"/>
@@ -2524,7 +2524,7 @@
           <a:p>
             <a:pPr lvl="0"/>
             <a:r>
-              <a:rPr lang="en-US" altLang="zh-TW" smtClean="0"/>
+              <a:rPr lang="en-US" altLang="zh-TW"/>
               <a:t>Edit Master text styles</a:t>
             </a:r>
           </a:p>
@@ -2547,7 +2547,7 @@
           <a:p>
             <a:fld id="{3D18440D-73A6-4284-860D-9AB8F0F2F29B}" type="datetimeFigureOut">
               <a:rPr lang="zh-TW" altLang="en-US" smtClean="0"/>
-              <a:t>2021/5/14</a:t>
+              <a:t>2025/10/11</a:t>
             </a:fld>
             <a:endParaRPr lang="zh-TW" altLang="en-US"/>
           </a:p>
@@ -2661,10 +2661,9 @@
           <a:lstStyle/>
           <a:p>
             <a:r>
-              <a:rPr lang="zh-TW" altLang="en-US" smtClean="0"/>
+              <a:rPr lang="zh-TW" altLang="en-US"/>
               <a:t>按一下以編輯母片標題樣式</a:t>
             </a:r>
-            <a:endParaRPr lang="zh-TW" altLang="en-US"/>
           </a:p>
         </p:txBody>
       </p:sp>
@@ -2695,38 +2694,37 @@
           <a:p>
             <a:pPr lvl="0"/>
             <a:r>
-              <a:rPr lang="zh-TW" altLang="en-US" smtClean="0"/>
+              <a:rPr lang="zh-TW" altLang="en-US"/>
               <a:t>按一下以編輯母片文字樣式</a:t>
             </a:r>
           </a:p>
           <a:p>
             <a:pPr lvl="1"/>
             <a:r>
-              <a:rPr lang="zh-TW" altLang="en-US" smtClean="0"/>
+              <a:rPr lang="zh-TW" altLang="en-US"/>
               <a:t>第二層</a:t>
             </a:r>
           </a:p>
           <a:p>
             <a:pPr lvl="2"/>
             <a:r>
-              <a:rPr lang="zh-TW" altLang="en-US" smtClean="0"/>
+              <a:rPr lang="zh-TW" altLang="en-US"/>
               <a:t>第三層</a:t>
             </a:r>
           </a:p>
           <a:p>
             <a:pPr lvl="3"/>
             <a:r>
-              <a:rPr lang="zh-TW" altLang="en-US" smtClean="0"/>
+              <a:rPr lang="zh-TW" altLang="en-US"/>
               <a:t>第四層</a:t>
             </a:r>
           </a:p>
           <a:p>
             <a:pPr lvl="4"/>
             <a:r>
-              <a:rPr lang="zh-TW" altLang="en-US" smtClean="0"/>
+              <a:rPr lang="zh-TW" altLang="en-US"/>
               <a:t>第五層</a:t>
             </a:r>
-            <a:endParaRPr lang="zh-TW" altLang="en-US"/>
           </a:p>
         </p:txBody>
       </p:sp>
@@ -2765,7 +2763,7 @@
           <a:p>
             <a:fld id="{3D18440D-73A6-4284-860D-9AB8F0F2F29B}" type="datetimeFigureOut">
               <a:rPr lang="zh-TW" altLang="en-US" smtClean="0"/>
-              <a:t>2021/5/14</a:t>
+              <a:t>2025/10/11</a:t>
             </a:fld>
             <a:endParaRPr lang="zh-TW" altLang="en-US"/>
           </a:p>
@@ -3196,23 +3194,6 @@
               </a:rPr>
               <a:t>91</a:t>
             </a:r>
-            <a:r>
-              <a:rPr lang="en-US" altLang="zh-CN" sz="7200" b="1" i="1" dirty="0">
-                <a:solidFill>
-                  <a:srgbClr val="660033"/>
-                </a:solidFill>
-                <a:effectLst>
-                  <a:outerShdw blurRad="38100" dist="38100" dir="2700000" algn="tl">
-                    <a:srgbClr val="000000">
-                      <a:alpha val="43137"/>
-                    </a:srgbClr>
-                  </a:outerShdw>
-                </a:effectLst>
-                <a:latin typeface="微軟正黑體" pitchFamily="34" charset="-120"/>
-                <a:ea typeface="微軟正黑體" pitchFamily="34" charset="-120"/>
-              </a:rPr>
-              <a:t/>
-            </a:r>
             <a:br>
               <a:rPr lang="en-US" altLang="zh-CN" sz="7200" b="1" i="1" dirty="0">
                 <a:solidFill>
@@ -3244,24 +3225,7 @@
                 <a:latin typeface="微軟正黑體" pitchFamily="34" charset="-120"/>
                 <a:ea typeface="微軟正黑體" pitchFamily="34" charset="-120"/>
               </a:rPr>
-              <a:t>我</a:t>
-            </a:r>
-            <a:r>
-              <a:rPr lang="zh-CN" altLang="en-US" sz="8000" b="1" dirty="0">
-                <a:solidFill>
-                  <a:srgbClr val="000066"/>
-                </a:solidFill>
-                <a:effectLst>
-                  <a:outerShdw blurRad="38100" dist="38100" dir="2700000" algn="tl">
-                    <a:srgbClr val="000000">
-                      <a:alpha val="43137"/>
-                    </a:srgbClr>
-                  </a:outerShdw>
-                </a:effectLst>
-                <a:latin typeface="微軟正黑體" pitchFamily="34" charset="-120"/>
-                <a:ea typeface="微軟正黑體" pitchFamily="34" charset="-120"/>
-              </a:rPr>
-              <a:t>知所信是誰</a:t>
+              <a:t>我知所信是誰</a:t>
             </a:r>
             <a:endParaRPr lang="zh-TW" altLang="en-US" sz="8000" b="1" dirty="0">
               <a:solidFill>
@@ -3290,13 +3254,6 @@
   <p:clrMapOvr>
     <a:masterClrMapping/>
   </p:clrMapOvr>
-  <p:timing>
-    <p:tnLst>
-      <p:par>
-        <p:cTn id="1" dur="indefinite" restart="never" nodeType="tmRoot"/>
-      </p:par>
-    </p:tnLst>
-  </p:timing>
 </p:sld>
 </file>
 
@@ -3367,13 +3324,6 @@
               </a:rPr>
               <a:t>使人知己罪污</a:t>
             </a:r>
-            <a:endParaRPr lang="zh-TW" altLang="en-US" sz="6400" b="1" dirty="0">
-              <a:solidFill>
-                <a:srgbClr val="000066"/>
-              </a:solidFill>
-              <a:latin typeface="Microsoft JhengHei" panose="020B0604030504040204" pitchFamily="34" charset="-120"/>
-              <a:ea typeface="Microsoft JhengHei" panose="020B0604030504040204" pitchFamily="34" charset="-120"/>
-            </a:endParaRPr>
           </a:p>
         </p:txBody>
       </p:sp>
@@ -3406,7 +3356,7 @@
                   <a:srgbClr val="000066"/>
                 </a:solidFill>
               </a:rPr>
-              <a:t>( 3 )</a:t>
+              <a:t>( 3 / 5 )</a:t>
             </a:r>
             <a:endParaRPr lang="vi-VN" sz="4800" b="1" dirty="0">
               <a:solidFill>
@@ -3426,13 +3376,6 @@
   <p:clrMapOvr>
     <a:masterClrMapping/>
   </p:clrMapOvr>
-  <p:timing>
-    <p:tnLst>
-      <p:par>
-        <p:cTn id="1" dur="indefinite" restart="never" nodeType="tmRoot"/>
-      </p:par>
-    </p:tnLst>
-  </p:timing>
 </p:sld>
 </file>
 
@@ -3503,13 +3446,6 @@
               </a:rPr>
               <a:t>引人信靠救主</a:t>
             </a:r>
-            <a:endParaRPr lang="zh-TW" altLang="en-US" sz="6400" b="1" dirty="0">
-              <a:solidFill>
-                <a:srgbClr val="000066"/>
-              </a:solidFill>
-              <a:latin typeface="Microsoft JhengHei" panose="020B0604030504040204" pitchFamily="34" charset="-120"/>
-              <a:ea typeface="Microsoft JhengHei" panose="020B0604030504040204" pitchFamily="34" charset="-120"/>
-            </a:endParaRPr>
           </a:p>
         </p:txBody>
       </p:sp>
@@ -3542,7 +3478,7 @@
                   <a:srgbClr val="000066"/>
                 </a:solidFill>
               </a:rPr>
-              <a:t>( 3 )</a:t>
+              <a:t>( 3 / 5 )</a:t>
             </a:r>
             <a:endParaRPr lang="vi-VN" sz="4800" b="1" dirty="0">
               <a:solidFill>
@@ -3562,13 +3498,6 @@
   <p:clrMapOvr>
     <a:masterClrMapping/>
   </p:clrMapOvr>
-  <p:timing>
-    <p:tnLst>
-      <p:par>
-        <p:cTn id="1" dur="indefinite" restart="never" nodeType="tmRoot"/>
-      </p:par>
-    </p:tnLst>
-  </p:timing>
 </p:sld>
 </file>
 
@@ -3639,13 +3568,6 @@
               </a:rPr>
               <a:t>也深信主能保守我交付</a:t>
             </a:r>
-            <a:endParaRPr lang="zh-TW" altLang="en-US" sz="6400" b="1" dirty="0">
-              <a:solidFill>
-                <a:srgbClr val="000066"/>
-              </a:solidFill>
-              <a:latin typeface="Microsoft JhengHei" panose="020B0604030504040204" pitchFamily="34" charset="-120"/>
-              <a:ea typeface="Microsoft JhengHei" panose="020B0604030504040204" pitchFamily="34" charset="-120"/>
-            </a:endParaRPr>
           </a:p>
         </p:txBody>
       </p:sp>
@@ -3659,13 +3581,6 @@
   <p:clrMapOvr>
     <a:masterClrMapping/>
   </p:clrMapOvr>
-  <p:timing>
-    <p:tnLst>
-      <p:par>
-        <p:cTn id="1" dur="indefinite" restart="never" nodeType="tmRoot"/>
-      </p:par>
-    </p:tnLst>
-  </p:timing>
 </p:sld>
 </file>
 
@@ -3736,13 +3651,6 @@
               </a:rPr>
               <a:t>都全備直到那日</a:t>
             </a:r>
-            <a:endParaRPr lang="zh-TW" altLang="en-US" sz="6400" b="1" dirty="0">
-              <a:solidFill>
-                <a:srgbClr val="000066"/>
-              </a:solidFill>
-              <a:latin typeface="Microsoft JhengHei" panose="020B0604030504040204" pitchFamily="34" charset="-120"/>
-              <a:ea typeface="Microsoft JhengHei" panose="020B0604030504040204" pitchFamily="34" charset="-120"/>
-            </a:endParaRPr>
           </a:p>
         </p:txBody>
       </p:sp>
@@ -3756,13 +3664,6 @@
   <p:clrMapOvr>
     <a:masterClrMapping/>
   </p:clrMapOvr>
-  <p:timing>
-    <p:tnLst>
-      <p:par>
-        <p:cTn id="1" dur="indefinite" restart="never" nodeType="tmRoot"/>
-      </p:par>
-    </p:tnLst>
-  </p:timing>
 </p:sld>
 </file>
 
@@ -3833,13 +3734,6 @@
               </a:rPr>
               <a:t>前途或順或逆</a:t>
             </a:r>
-            <a:endParaRPr lang="zh-TW" altLang="en-US" sz="6400" b="1" dirty="0">
-              <a:solidFill>
-                <a:srgbClr val="000066"/>
-              </a:solidFill>
-              <a:latin typeface="Microsoft JhengHei" panose="020B0604030504040204" pitchFamily="34" charset="-120"/>
-              <a:ea typeface="Microsoft JhengHei" panose="020B0604030504040204" pitchFamily="34" charset="-120"/>
-            </a:endParaRPr>
           </a:p>
         </p:txBody>
       </p:sp>
@@ -3872,7 +3766,7 @@
                   <a:srgbClr val="000066"/>
                 </a:solidFill>
               </a:rPr>
-              <a:t>( 4 )</a:t>
+              <a:t>( 4 / 5 )</a:t>
             </a:r>
             <a:endParaRPr lang="vi-VN" sz="4800" b="1" dirty="0">
               <a:solidFill>
@@ -3892,13 +3786,6 @@
   <p:clrMapOvr>
     <a:masterClrMapping/>
   </p:clrMapOvr>
-  <p:timing>
-    <p:tnLst>
-      <p:par>
-        <p:cTn id="1" dur="indefinite" restart="never" nodeType="tmRoot"/>
-      </p:par>
-    </p:tnLst>
-  </p:timing>
 </p:sld>
 </file>
 
@@ -3969,13 +3856,6 @@
               </a:rPr>
               <a:t>主必看顧到底</a:t>
             </a:r>
-            <a:endParaRPr lang="zh-TW" altLang="en-US" sz="6400" b="1" dirty="0">
-              <a:solidFill>
-                <a:srgbClr val="000066"/>
-              </a:solidFill>
-              <a:latin typeface="Microsoft JhengHei" panose="020B0604030504040204" pitchFamily="34" charset="-120"/>
-              <a:ea typeface="Microsoft JhengHei" panose="020B0604030504040204" pitchFamily="34" charset="-120"/>
-            </a:endParaRPr>
           </a:p>
         </p:txBody>
       </p:sp>
@@ -4008,7 +3888,7 @@
                   <a:srgbClr val="000066"/>
                 </a:solidFill>
               </a:rPr>
-              <a:t>( 4 )</a:t>
+              <a:t>( 4 / 5 )</a:t>
             </a:r>
             <a:endParaRPr lang="vi-VN" sz="4800" b="1" dirty="0">
               <a:solidFill>
@@ -4028,13 +3908,6 @@
   <p:clrMapOvr>
     <a:masterClrMapping/>
   </p:clrMapOvr>
-  <p:timing>
-    <p:tnLst>
-      <p:par>
-        <p:cTn id="1" dur="indefinite" restart="never" nodeType="tmRoot"/>
-      </p:par>
-    </p:tnLst>
-  </p:timing>
 </p:sld>
 </file>
 
@@ -4105,13 +3978,6 @@
               </a:rPr>
               <a:t>也深信主能保守我交付</a:t>
             </a:r>
-            <a:endParaRPr lang="zh-TW" altLang="en-US" sz="6400" b="1" dirty="0">
-              <a:solidFill>
-                <a:srgbClr val="000066"/>
-              </a:solidFill>
-              <a:latin typeface="Microsoft JhengHei" panose="020B0604030504040204" pitchFamily="34" charset="-120"/>
-              <a:ea typeface="Microsoft JhengHei" panose="020B0604030504040204" pitchFamily="34" charset="-120"/>
-            </a:endParaRPr>
           </a:p>
         </p:txBody>
       </p:sp>
@@ -4125,13 +3991,6 @@
   <p:clrMapOvr>
     <a:masterClrMapping/>
   </p:clrMapOvr>
-  <p:timing>
-    <p:tnLst>
-      <p:par>
-        <p:cTn id="1" dur="indefinite" restart="never" nodeType="tmRoot"/>
-      </p:par>
-    </p:tnLst>
-  </p:timing>
 </p:sld>
 </file>
 
@@ -4202,13 +4061,6 @@
               </a:rPr>
               <a:t>都全備直到那日</a:t>
             </a:r>
-            <a:endParaRPr lang="zh-TW" altLang="en-US" sz="6400" b="1" dirty="0">
-              <a:solidFill>
-                <a:srgbClr val="000066"/>
-              </a:solidFill>
-              <a:latin typeface="Microsoft JhengHei" panose="020B0604030504040204" pitchFamily="34" charset="-120"/>
-              <a:ea typeface="Microsoft JhengHei" panose="020B0604030504040204" pitchFamily="34" charset="-120"/>
-            </a:endParaRPr>
           </a:p>
         </p:txBody>
       </p:sp>
@@ -4222,13 +4074,6 @@
   <p:clrMapOvr>
     <a:masterClrMapping/>
   </p:clrMapOvr>
-  <p:timing>
-    <p:tnLst>
-      <p:par>
-        <p:cTn id="1" dur="indefinite" restart="never" nodeType="tmRoot"/>
-      </p:par>
-    </p:tnLst>
-  </p:timing>
 </p:sld>
 </file>
 
@@ -4306,13 +4151,6 @@
               </a:rPr>
               <a:t>如何與主相逢</a:t>
             </a:r>
-            <a:endParaRPr lang="zh-TW" altLang="en-US" sz="6400" b="1" dirty="0">
-              <a:solidFill>
-                <a:srgbClr val="000066"/>
-              </a:solidFill>
-              <a:latin typeface="Microsoft JhengHei" panose="020B0604030504040204" pitchFamily="34" charset="-120"/>
-              <a:ea typeface="Microsoft JhengHei" panose="020B0604030504040204" pitchFamily="34" charset="-120"/>
-            </a:endParaRPr>
           </a:p>
         </p:txBody>
       </p:sp>
@@ -4345,7 +4183,7 @@
                   <a:srgbClr val="000066"/>
                 </a:solidFill>
               </a:rPr>
-              <a:t>( 5 )</a:t>
+              <a:t>( 5 / 5 )</a:t>
             </a:r>
             <a:endParaRPr lang="vi-VN" sz="4800" b="1" dirty="0">
               <a:solidFill>
@@ -4365,13 +4203,6 @@
   <p:clrMapOvr>
     <a:masterClrMapping/>
   </p:clrMapOvr>
-  <p:timing>
-    <p:tnLst>
-      <p:par>
-        <p:cTn id="1" dur="indefinite" restart="never" nodeType="tmRoot"/>
-      </p:par>
-    </p:tnLst>
-  </p:timing>
 </p:sld>
 </file>
 
@@ -4481,7 +4312,7 @@
                   <a:srgbClr val="000066"/>
                 </a:solidFill>
               </a:rPr>
-              <a:t>( 5 )</a:t>
+              <a:t>( 5 / 5 )</a:t>
             </a:r>
             <a:endParaRPr lang="vi-VN" sz="4800" b="1" dirty="0">
               <a:solidFill>
@@ -4501,13 +4332,6 @@
   <p:clrMapOvr>
     <a:masterClrMapping/>
   </p:clrMapOvr>
-  <p:timing>
-    <p:tnLst>
-      <p:par>
-        <p:cTn id="1" dur="indefinite" restart="never" nodeType="tmRoot"/>
-      </p:par>
-    </p:tnLst>
-  </p:timing>
 </p:sld>
 </file>
 
@@ -4578,13 +4402,6 @@
               </a:rPr>
               <a:t>待我如此深厚</a:t>
             </a:r>
-            <a:endParaRPr lang="zh-TW" altLang="en-US" sz="6400" b="1" dirty="0">
-              <a:solidFill>
-                <a:srgbClr val="000066"/>
-              </a:solidFill>
-              <a:latin typeface="Microsoft JhengHei" panose="020B0604030504040204" pitchFamily="34" charset="-120"/>
-              <a:ea typeface="Microsoft JhengHei" panose="020B0604030504040204" pitchFamily="34" charset="-120"/>
-            </a:endParaRPr>
           </a:p>
         </p:txBody>
       </p:sp>
@@ -4617,7 +4434,7 @@
                   <a:srgbClr val="000066"/>
                 </a:solidFill>
               </a:rPr>
-              <a:t>( 1 )</a:t>
+              <a:t>( 1 / 5 )</a:t>
             </a:r>
             <a:endParaRPr lang="vi-VN" sz="4800" b="1" dirty="0">
               <a:solidFill>
@@ -4637,13 +4454,6 @@
   <p:clrMapOvr>
     <a:masterClrMapping/>
   </p:clrMapOvr>
-  <p:timing>
-    <p:tnLst>
-      <p:par>
-        <p:cTn id="1" dur="indefinite" restart="never" nodeType="tmRoot"/>
-      </p:par>
-    </p:tnLst>
-  </p:timing>
 </p:sld>
 </file>
 
@@ -4714,13 +4524,6 @@
               </a:rPr>
               <a:t>也深信主能保守我交付</a:t>
             </a:r>
-            <a:endParaRPr lang="zh-TW" altLang="en-US" sz="6400" b="1" dirty="0">
-              <a:solidFill>
-                <a:srgbClr val="000066"/>
-              </a:solidFill>
-              <a:latin typeface="Microsoft JhengHei" panose="020B0604030504040204" pitchFamily="34" charset="-120"/>
-              <a:ea typeface="Microsoft JhengHei" panose="020B0604030504040204" pitchFamily="34" charset="-120"/>
-            </a:endParaRPr>
           </a:p>
         </p:txBody>
       </p:sp>
@@ -4734,13 +4537,6 @@
   <p:clrMapOvr>
     <a:masterClrMapping/>
   </p:clrMapOvr>
-  <p:timing>
-    <p:tnLst>
-      <p:par>
-        <p:cTn id="1" dur="indefinite" restart="never" nodeType="tmRoot"/>
-      </p:par>
-    </p:tnLst>
-  </p:timing>
 </p:sld>
 </file>
 
@@ -4811,13 +4607,6 @@
               </a:rPr>
               <a:t>都全備直到那日</a:t>
             </a:r>
-            <a:endParaRPr lang="zh-TW" altLang="en-US" sz="6400" b="1" dirty="0">
-              <a:solidFill>
-                <a:srgbClr val="000066"/>
-              </a:solidFill>
-              <a:latin typeface="Microsoft JhengHei" panose="020B0604030504040204" pitchFamily="34" charset="-120"/>
-              <a:ea typeface="Microsoft JhengHei" panose="020B0604030504040204" pitchFamily="34" charset="-120"/>
-            </a:endParaRPr>
           </a:p>
         </p:txBody>
       </p:sp>
@@ -4831,13 +4620,6 @@
   <p:clrMapOvr>
     <a:masterClrMapping/>
   </p:clrMapOvr>
-  <p:timing>
-    <p:tnLst>
-      <p:par>
-        <p:cTn id="1" dur="indefinite" restart="never" nodeType="tmRoot"/>
-      </p:par>
-    </p:tnLst>
-  </p:timing>
 </p:sld>
 </file>
 
@@ -4947,7 +4729,7 @@
                   <a:srgbClr val="000066"/>
                 </a:solidFill>
               </a:rPr>
-              <a:t>( 1 )</a:t>
+              <a:t>( 1 / 5 )</a:t>
             </a:r>
             <a:endParaRPr lang="vi-VN" sz="4800" b="1" dirty="0">
               <a:solidFill>
@@ -4967,13 +4749,6 @@
   <p:clrMapOvr>
     <a:masterClrMapping/>
   </p:clrMapOvr>
-  <p:timing>
-    <p:tnLst>
-      <p:par>
-        <p:cTn id="1" dur="indefinite" restart="never" nodeType="tmRoot"/>
-      </p:par>
-    </p:tnLst>
-  </p:timing>
 </p:sld>
 </file>
 
@@ -5044,13 +4819,6 @@
               </a:rPr>
               <a:t>也深信主能保守我交付</a:t>
             </a:r>
-            <a:endParaRPr lang="zh-TW" altLang="en-US" sz="6400" b="1" dirty="0">
-              <a:solidFill>
-                <a:srgbClr val="000066"/>
-              </a:solidFill>
-              <a:latin typeface="Microsoft JhengHei" panose="020B0604030504040204" pitchFamily="34" charset="-120"/>
-              <a:ea typeface="Microsoft JhengHei" panose="020B0604030504040204" pitchFamily="34" charset="-120"/>
-            </a:endParaRPr>
           </a:p>
         </p:txBody>
       </p:sp>
@@ -5064,13 +4832,6 @@
   <p:clrMapOvr>
     <a:masterClrMapping/>
   </p:clrMapOvr>
-  <p:timing>
-    <p:tnLst>
-      <p:par>
-        <p:cTn id="1" dur="indefinite" restart="never" nodeType="tmRoot"/>
-      </p:par>
-    </p:tnLst>
-  </p:timing>
 </p:sld>
 </file>
 
@@ -5141,13 +4902,6 @@
               </a:rPr>
               <a:t>都全備直到那日</a:t>
             </a:r>
-            <a:endParaRPr lang="zh-TW" altLang="en-US" sz="6400" b="1" dirty="0">
-              <a:solidFill>
-                <a:srgbClr val="000066"/>
-              </a:solidFill>
-              <a:latin typeface="Microsoft JhengHei" panose="020B0604030504040204" pitchFamily="34" charset="-120"/>
-              <a:ea typeface="Microsoft JhengHei" panose="020B0604030504040204" pitchFamily="34" charset="-120"/>
-            </a:endParaRPr>
           </a:p>
         </p:txBody>
       </p:sp>
@@ -5161,13 +4915,6 @@
   <p:clrMapOvr>
     <a:masterClrMapping/>
   </p:clrMapOvr>
-  <p:timing>
-    <p:tnLst>
-      <p:par>
-        <p:cTn id="1" dur="indefinite" restart="never" nodeType="tmRoot"/>
-      </p:par>
-    </p:tnLst>
-  </p:timing>
 </p:sld>
 </file>
 
@@ -5238,13 +4985,6 @@
               </a:rPr>
               <a:t>恩門向我放開</a:t>
             </a:r>
-            <a:endParaRPr lang="zh-TW" altLang="en-US" sz="6400" b="1" dirty="0">
-              <a:solidFill>
-                <a:srgbClr val="000066"/>
-              </a:solidFill>
-              <a:latin typeface="Microsoft JhengHei" panose="020B0604030504040204" pitchFamily="34" charset="-120"/>
-              <a:ea typeface="Microsoft JhengHei" panose="020B0604030504040204" pitchFamily="34" charset="-120"/>
-            </a:endParaRPr>
           </a:p>
         </p:txBody>
       </p:sp>
@@ -5277,7 +5017,7 @@
                   <a:srgbClr val="000066"/>
                 </a:solidFill>
               </a:rPr>
-              <a:t>( 2 )</a:t>
+              <a:t>( 2 / 5 )</a:t>
             </a:r>
             <a:endParaRPr lang="vi-VN" sz="4800" b="1" dirty="0">
               <a:solidFill>
@@ -5297,13 +5037,6 @@
   <p:clrMapOvr>
     <a:masterClrMapping/>
   </p:clrMapOvr>
-  <p:timing>
-    <p:tnLst>
-      <p:par>
-        <p:cTn id="1" dur="indefinite" restart="never" nodeType="tmRoot"/>
-      </p:par>
-    </p:tnLst>
-  </p:timing>
 </p:sld>
 </file>
 
@@ -5423,7 +5156,7 @@
                   <a:srgbClr val="000066"/>
                 </a:solidFill>
               </a:rPr>
-              <a:t>( 2 )</a:t>
+              <a:t>( 2 / 5 )</a:t>
             </a:r>
             <a:endParaRPr lang="vi-VN" sz="4800" b="1" dirty="0">
               <a:solidFill>
@@ -5443,13 +5176,6 @@
   <p:clrMapOvr>
     <a:masterClrMapping/>
   </p:clrMapOvr>
-  <p:timing>
-    <p:tnLst>
-      <p:par>
-        <p:cTn id="1" dur="indefinite" restart="never" nodeType="tmRoot"/>
-      </p:par>
-    </p:tnLst>
-  </p:timing>
 </p:sld>
 </file>
 
@@ -5520,13 +5246,6 @@
               </a:rPr>
               <a:t>也深信主能保守我交付</a:t>
             </a:r>
-            <a:endParaRPr lang="zh-TW" altLang="en-US" sz="6400" b="1" dirty="0">
-              <a:solidFill>
-                <a:srgbClr val="000066"/>
-              </a:solidFill>
-              <a:latin typeface="Microsoft JhengHei" panose="020B0604030504040204" pitchFamily="34" charset="-120"/>
-              <a:ea typeface="Microsoft JhengHei" panose="020B0604030504040204" pitchFamily="34" charset="-120"/>
-            </a:endParaRPr>
           </a:p>
         </p:txBody>
       </p:sp>
@@ -5540,13 +5259,6 @@
   <p:clrMapOvr>
     <a:masterClrMapping/>
   </p:clrMapOvr>
-  <p:timing>
-    <p:tnLst>
-      <p:par>
-        <p:cTn id="1" dur="indefinite" restart="never" nodeType="tmRoot"/>
-      </p:par>
-    </p:tnLst>
-  </p:timing>
 </p:sld>
 </file>
 
@@ -5617,13 +5329,6 @@
               </a:rPr>
               <a:t>都全備直到那日</a:t>
             </a:r>
-            <a:endParaRPr lang="zh-TW" altLang="en-US" sz="6400" b="1" dirty="0">
-              <a:solidFill>
-                <a:srgbClr val="000066"/>
-              </a:solidFill>
-              <a:latin typeface="Microsoft JhengHei" panose="020B0604030504040204" pitchFamily="34" charset="-120"/>
-              <a:ea typeface="Microsoft JhengHei" panose="020B0604030504040204" pitchFamily="34" charset="-120"/>
-            </a:endParaRPr>
           </a:p>
         </p:txBody>
       </p:sp>
@@ -5637,13 +5342,6 @@
   <p:clrMapOvr>
     <a:masterClrMapping/>
   </p:clrMapOvr>
-  <p:timing>
-    <p:tnLst>
-      <p:par>
-        <p:cTn id="1" dur="indefinite" restart="never" nodeType="tmRoot"/>
-      </p:par>
-    </p:tnLst>
-  </p:timing>
 </p:sld>
 </file>
 
